--- a/generated/Tier 1 Broker Scorecards/CRC Insurance Services, Inc_Broker_Scorecard.pptx
+++ b/generated/Tier 1 Broker Scorecards/CRC Insurance Services, Inc_Broker_Scorecard.pptx
@@ -3394,7 +3394,7 @@
                         <a:rPr sz="900">
                           <a:latin typeface="Segoe UI"/>
                         </a:rPr>
-                        <a:t>Tier 1  |  4.18% / 15.00%</a:t>
+                        <a:t>Tier 1  |  4.29% / 15.00%</a:t>
                       </a:r>
                     </a:p>
                   </a:txBody>
@@ -3653,7 +3653,7 @@
                         <a:rPr sz="900">
                           <a:latin typeface="Segoe UI"/>
                         </a:rPr>
-                        <a:t>Fleet Subs: 85  |  Binds: 7</a:t>
+                        <a:t>Fleet Subs: 87  |  Binds: 7</a:t>
                       </a:r>
                     </a:p>
                   </a:txBody>
@@ -3690,7 +3690,7 @@
                         <a:rPr sz="900">
                           <a:latin typeface="Segoe UI"/>
                         </a:rPr>
-                        <a:t>Fleet Bound Premium: $402,855.88</a:t>
+                        <a:t>Fleet Bound Premium: $397,174.60</a:t>
                       </a:r>
                     </a:p>
                   </a:txBody>
@@ -3727,7 +3727,7 @@
                         <a:rPr sz="900">
                           <a:latin typeface="Segoe UI"/>
                         </a:rPr>
-                        <a:t>Fleet Book %: 56.1%</a:t>
+                        <a:t>Fleet Book %: 55.3%</a:t>
                       </a:r>
                     </a:p>
                   </a:txBody>
@@ -3766,7 +3766,7 @@
                         <a:rPr sz="900">
                           <a:latin typeface="Segoe UI"/>
                         </a:rPr>
-                        <a:t>Non-Fleet Subs: 632  |  Binds: 23</a:t>
+                        <a:t>Non-Fleet Subs: 636  |  Binds: 24</a:t>
                       </a:r>
                     </a:p>
                   </a:txBody>
@@ -3803,7 +3803,7 @@
                         <a:rPr sz="900">
                           <a:latin typeface="Segoe UI"/>
                         </a:rPr>
-                        <a:t>Non-Fleet Bound Premium: $315,635.97</a:t>
+                        <a:t>Non-Fleet Bound Premium: $321,317.25</a:t>
                       </a:r>
                     </a:p>
                   </a:txBody>
@@ -3840,7 +3840,7 @@
                         <a:rPr sz="900">
                           <a:latin typeface="Segoe UI"/>
                         </a:rPr>
-                        <a:t>Non-Fleet Book %: 43.9%</a:t>
+                        <a:t>Non-Fleet Book %: 44.7%</a:t>
                       </a:r>
                     </a:p>
                   </a:txBody>
@@ -4428,7 +4428,7 @@
                           </a:solidFill>
                           <a:latin typeface="Segoe UI"/>
                         </a:rPr>
-                        <a:t>121</a:t>
+                        <a:t>128</a:t>
                       </a:r>
                     </a:p>
                   </a:txBody>
@@ -4707,7 +4707,7 @@
                           </a:solidFill>
                           <a:latin typeface="Segoe UI"/>
                         </a:rPr>
-                        <a:t>5.0%</a:t>
+                        <a:t>6.2%</a:t>
                       </a:r>
                     </a:p>
                   </a:txBody>
@@ -4983,7 +4983,7 @@
                           </a:solidFill>
                           <a:latin typeface="Segoe UI"/>
                         </a:rPr>
-                        <a:t>6</a:t>
+                        <a:t>8</a:t>
                       </a:r>
                     </a:p>
                   </a:txBody>

--- a/generated/Tier 1 Broker Scorecards/CRC Insurance Services, Inc_Broker_Scorecard.pptx
+++ b/generated/Tier 1 Broker Scorecards/CRC Insurance Services, Inc_Broker_Scorecard.pptx
@@ -3394,7 +3394,7 @@
                         <a:rPr sz="900">
                           <a:latin typeface="Segoe UI"/>
                         </a:rPr>
-                        <a:t>Tier 1  |  4.29% / 15.00%</a:t>
+                        <a:t>Tier 1  |  4.23% / 15.00%</a:t>
                       </a:r>
                     </a:p>
                   </a:txBody>
@@ -3653,7 +3653,7 @@
                         <a:rPr sz="900">
                           <a:latin typeface="Segoe UI"/>
                         </a:rPr>
-                        <a:t>Fleet Subs: 87  |  Binds: 7</a:t>
+                        <a:t>Fleet Subs: 88  |  Binds: 7</a:t>
                       </a:r>
                     </a:p>
                   </a:txBody>
@@ -3766,7 +3766,7 @@
                         <a:rPr sz="900">
                           <a:latin typeface="Segoe UI"/>
                         </a:rPr>
-                        <a:t>Non-Fleet Subs: 636  |  Binds: 24</a:t>
+                        <a:t>Non-Fleet Subs: 645  |  Binds: 24</a:t>
                       </a:r>
                     </a:p>
                   </a:txBody>
@@ -4428,7 +4428,7 @@
                           </a:solidFill>
                           <a:latin typeface="Segoe UI"/>
                         </a:rPr>
-                        <a:t>128</a:t>
+                        <a:t>138</a:t>
                       </a:r>
                     </a:p>
                   </a:txBody>
@@ -4707,7 +4707,7 @@
                           </a:solidFill>
                           <a:latin typeface="Segoe UI"/>
                         </a:rPr>
-                        <a:t>6.2%</a:t>
+                        <a:t>5.8%</a:t>
                       </a:r>
                     </a:p>
                   </a:txBody>

--- a/generated/Tier 1 Broker Scorecards/CRC Insurance Services, Inc_Broker_Scorecard.pptx
+++ b/generated/Tier 1 Broker Scorecards/CRC Insurance Services, Inc_Broker_Scorecard.pptx
@@ -3357,7 +3357,7 @@
                         <a:rPr sz="800">
                           <a:latin typeface="Segoe UI"/>
                         </a:rPr>
-                        <a:t>$4,332,023.30 / $3,813,122.84 / $718,491.85</a:t>
+                        <a:t>$4,332,023.30 / $3,818,219.82 / $723,588.83</a:t>
                       </a:r>
                     </a:p>
                   </a:txBody>
@@ -3394,7 +3394,7 @@
                         <a:rPr sz="900">
                           <a:latin typeface="Segoe UI"/>
                         </a:rPr>
-                        <a:t>Tier 1  |  4.23% / 15.00%</a:t>
+                        <a:t>Tier 1  |  4.32% / 15.00%</a:t>
                       </a:r>
                     </a:p>
                   </a:txBody>
@@ -3431,7 +3431,7 @@
                         <a:rPr sz="900">
                           <a:latin typeface="Segoe UI"/>
                         </a:rPr>
-                        <a:t>$6,064,832.62  (11.8% achieved)</a:t>
+                        <a:t>$6,064,832.62  (11.9% achieved)</a:t>
                       </a:r>
                     </a:p>
                   </a:txBody>
@@ -3653,7 +3653,7 @@
                         <a:rPr sz="900">
                           <a:latin typeface="Segoe UI"/>
                         </a:rPr>
-                        <a:t>Fleet Subs: 88  |  Binds: 7</a:t>
+                        <a:t>Fleet Subs: 89  |  Binds: 7</a:t>
                       </a:r>
                     </a:p>
                   </a:txBody>
@@ -3690,7 +3690,7 @@
                         <a:rPr sz="900">
                           <a:latin typeface="Segoe UI"/>
                         </a:rPr>
-                        <a:t>Fleet Bound Premium: $397,174.60</a:t>
+                        <a:t>Fleet Bound Premium: $394,930.75</a:t>
                       </a:r>
                     </a:p>
                   </a:txBody>
@@ -3727,7 +3727,7 @@
                         <a:rPr sz="900">
                           <a:latin typeface="Segoe UI"/>
                         </a:rPr>
-                        <a:t>Fleet Book %: 55.3%</a:t>
+                        <a:t>Fleet Book %: 54.6%</a:t>
                       </a:r>
                     </a:p>
                   </a:txBody>
@@ -3766,7 +3766,7 @@
                         <a:rPr sz="900">
                           <a:latin typeface="Segoe UI"/>
                         </a:rPr>
-                        <a:t>Non-Fleet Subs: 645  |  Binds: 24</a:t>
+                        <a:t>Non-Fleet Subs: 651  |  Binds: 25</a:t>
                       </a:r>
                     </a:p>
                   </a:txBody>
@@ -3803,7 +3803,7 @@
                         <a:rPr sz="900">
                           <a:latin typeface="Segoe UI"/>
                         </a:rPr>
-                        <a:t>Non-Fleet Bound Premium: $321,317.25</a:t>
+                        <a:t>Non-Fleet Bound Premium: $328,658.08</a:t>
                       </a:r>
                     </a:p>
                   </a:txBody>
@@ -3840,7 +3840,7 @@
                         <a:rPr sz="900">
                           <a:latin typeface="Segoe UI"/>
                         </a:rPr>
-                        <a:t>Non-Fleet Book %: 44.7%</a:t>
+                        <a:t>Non-Fleet Book %: 45.4%</a:t>
                       </a:r>
                     </a:p>
                   </a:txBody>
@@ -4428,7 +4428,7 @@
                           </a:solidFill>
                           <a:latin typeface="Segoe UI"/>
                         </a:rPr>
-                        <a:t>138</a:t>
+                        <a:t>146</a:t>
                       </a:r>
                     </a:p>
                   </a:txBody>
@@ -4707,7 +4707,7 @@
                           </a:solidFill>
                           <a:latin typeface="Segoe UI"/>
                         </a:rPr>
-                        <a:t>5.8%</a:t>
+                        <a:t>6.8%</a:t>
                       </a:r>
                     </a:p>
                   </a:txBody>
@@ -4983,7 +4983,7 @@
                           </a:solidFill>
                           <a:latin typeface="Segoe UI"/>
                         </a:rPr>
-                        <a:t>8</a:t>
+                        <a:t>10</a:t>
                       </a:r>
                     </a:p>
                   </a:txBody>
@@ -5262,7 +5262,7 @@
                           </a:solidFill>
                           <a:latin typeface="Segoe UI"/>
                         </a:rPr>
-                        <a:t>$160.5K</a:t>
+                        <a:t>$165.6K</a:t>
                       </a:r>
                     </a:p>
                   </a:txBody>

--- a/generated/Tier 1 Broker Scorecards/CRC Insurance Services, Inc_Broker_Scorecard.pptx
+++ b/generated/Tier 1 Broker Scorecards/CRC Insurance Services, Inc_Broker_Scorecard.pptx
@@ -3357,7 +3357,7 @@
                         <a:rPr sz="800">
                           <a:latin typeface="Segoe UI"/>
                         </a:rPr>
-                        <a:t>$4,332,023.30 / $3,818,219.82 / $723,588.83</a:t>
+                        <a:t>$4,332,023.30 / $3,822,774.33 / $728,143.34</a:t>
                       </a:r>
                     </a:p>
                   </a:txBody>
@@ -3394,7 +3394,7 @@
                         <a:rPr sz="900">
                           <a:latin typeface="Segoe UI"/>
                         </a:rPr>
-                        <a:t>Tier 1  |  4.32% / 15.00%</a:t>
+                        <a:t>Tier 1  |  4.18% / 15.00%</a:t>
                       </a:r>
                     </a:p>
                   </a:txBody>
@@ -3431,7 +3431,7 @@
                         <a:rPr sz="900">
                           <a:latin typeface="Segoe UI"/>
                         </a:rPr>
-                        <a:t>$6,064,832.62  (11.9% achieved)</a:t>
+                        <a:t>$6,064,832.62  (12.0% achieved)</a:t>
                       </a:r>
                     </a:p>
                   </a:txBody>
@@ -3653,7 +3653,7 @@
                         <a:rPr sz="900">
                           <a:latin typeface="Segoe UI"/>
                         </a:rPr>
-                        <a:t>Fleet Subs: 89  |  Binds: 7</a:t>
+                        <a:t>Fleet Subs: 89  |  Binds: 6</a:t>
                       </a:r>
                     </a:p>
                   </a:txBody>
@@ -3690,7 +3690,7 @@
                         <a:rPr sz="900">
                           <a:latin typeface="Segoe UI"/>
                         </a:rPr>
-                        <a:t>Fleet Bound Premium: $394,930.75</a:t>
+                        <a:t>Fleet Bound Premium: $382,777.12</a:t>
                       </a:r>
                     </a:p>
                   </a:txBody>
@@ -3727,7 +3727,7 @@
                         <a:rPr sz="900">
                           <a:latin typeface="Segoe UI"/>
                         </a:rPr>
-                        <a:t>Fleet Book %: 54.6%</a:t>
+                        <a:t>Fleet Book %: 52.6%</a:t>
                       </a:r>
                     </a:p>
                   </a:txBody>
@@ -3766,7 +3766,7 @@
                         <a:rPr sz="900">
                           <a:latin typeface="Segoe UI"/>
                         </a:rPr>
-                        <a:t>Non-Fleet Subs: 651  |  Binds: 25</a:t>
+                        <a:t>Non-Fleet Subs: 653  |  Binds: 25</a:t>
                       </a:r>
                     </a:p>
                   </a:txBody>
@@ -3803,7 +3803,7 @@
                         <a:rPr sz="900">
                           <a:latin typeface="Segoe UI"/>
                         </a:rPr>
-                        <a:t>Non-Fleet Bound Premium: $328,658.08</a:t>
+                        <a:t>Non-Fleet Bound Premium: $345,366.22</a:t>
                       </a:r>
                     </a:p>
                   </a:txBody>
@@ -3840,7 +3840,7 @@
                         <a:rPr sz="900">
                           <a:latin typeface="Segoe UI"/>
                         </a:rPr>
-                        <a:t>Non-Fleet Book %: 45.4%</a:t>
+                        <a:t>Non-Fleet Book %: 47.4%</a:t>
                       </a:r>
                     </a:p>
                   </a:txBody>
@@ -4428,7 +4428,7 @@
                           </a:solidFill>
                           <a:latin typeface="Segoe UI"/>
                         </a:rPr>
-                        <a:t>146</a:t>
+                        <a:t>148</a:t>
                       </a:r>
                     </a:p>
                   </a:txBody>
@@ -4707,7 +4707,7 @@
                           </a:solidFill>
                           <a:latin typeface="Segoe UI"/>
                         </a:rPr>
-                        <a:t>6.8%</a:t>
+                        <a:t>6.1%</a:t>
                       </a:r>
                     </a:p>
                   </a:txBody>
@@ -4983,7 +4983,7 @@
                           </a:solidFill>
                           <a:latin typeface="Segoe UI"/>
                         </a:rPr>
-                        <a:t>10</a:t>
+                        <a:t>9</a:t>
                       </a:r>
                     </a:p>
                   </a:txBody>
@@ -5262,7 +5262,7 @@
                           </a:solidFill>
                           <a:latin typeface="Segoe UI"/>
                         </a:rPr>
-                        <a:t>$165.6K</a:t>
+                        <a:t>$170.2K</a:t>
                       </a:r>
                     </a:p>
                   </a:txBody>

--- a/generated/Tier 1 Broker Scorecards/CRC Insurance Services, Inc_Broker_Scorecard.pptx
+++ b/generated/Tier 1 Broker Scorecards/CRC Insurance Services, Inc_Broker_Scorecard.pptx
@@ -3357,7 +3357,7 @@
                         <a:rPr sz="800">
                           <a:latin typeface="Segoe UI"/>
                         </a:rPr>
-                        <a:t>$4,332,023.30 / $3,822,774.33 / $728,143.34</a:t>
+                        <a:t>$4,332,023.30 / $3,820,253.14 / $725,622.15</a:t>
                       </a:r>
                     </a:p>
                   </a:txBody>
@@ -3394,7 +3394,7 @@
                         <a:rPr sz="900">
                           <a:latin typeface="Segoe UI"/>
                         </a:rPr>
-                        <a:t>Tier 1  |  4.18% / 15.00%</a:t>
+                        <a:t>Tier 1  |  4.14% / 15.00%</a:t>
                       </a:r>
                     </a:p>
                   </a:txBody>
@@ -3690,7 +3690,7 @@
                         <a:rPr sz="900">
                           <a:latin typeface="Segoe UI"/>
                         </a:rPr>
-                        <a:t>Fleet Bound Premium: $382,777.12</a:t>
+                        <a:t>Fleet Bound Premium: $381,514.45</a:t>
                       </a:r>
                     </a:p>
                   </a:txBody>
@@ -3766,7 +3766,7 @@
                         <a:rPr sz="900">
                           <a:latin typeface="Segoe UI"/>
                         </a:rPr>
-                        <a:t>Non-Fleet Subs: 653  |  Binds: 25</a:t>
+                        <a:t>Non-Fleet Subs: 659  |  Binds: 25</a:t>
                       </a:r>
                     </a:p>
                   </a:txBody>
@@ -3803,7 +3803,7 @@
                         <a:rPr sz="900">
                           <a:latin typeface="Segoe UI"/>
                         </a:rPr>
-                        <a:t>Non-Fleet Bound Premium: $345,366.22</a:t>
+                        <a:t>Non-Fleet Bound Premium: $344,107.70</a:t>
                       </a:r>
                     </a:p>
                   </a:txBody>
@@ -4428,7 +4428,7 @@
                           </a:solidFill>
                           <a:latin typeface="Segoe UI"/>
                         </a:rPr>
-                        <a:t>148</a:t>
+                        <a:t>155</a:t>
                       </a:r>
                     </a:p>
                   </a:txBody>
@@ -4707,7 +4707,7 @@
                           </a:solidFill>
                           <a:latin typeface="Segoe UI"/>
                         </a:rPr>
-                        <a:t>6.1%</a:t>
+                        <a:t>5.8%</a:t>
                       </a:r>
                     </a:p>
                   </a:txBody>
@@ -5262,7 +5262,7 @@
                           </a:solidFill>
                           <a:latin typeface="Segoe UI"/>
                         </a:rPr>
-                        <a:t>$170.2K</a:t>
+                        <a:t>$167.7K</a:t>
                       </a:r>
                     </a:p>
                   </a:txBody>

--- a/generated/Tier 1 Broker Scorecards/CRC Insurance Services, Inc_Broker_Scorecard.pptx
+++ b/generated/Tier 1 Broker Scorecards/CRC Insurance Services, Inc_Broker_Scorecard.pptx
@@ -3766,7 +3766,7 @@
                         <a:rPr sz="900">
                           <a:latin typeface="Segoe UI"/>
                         </a:rPr>
-                        <a:t>Non-Fleet Subs: 659  |  Binds: 25</a:t>
+                        <a:t>Non-Fleet Subs: 660  |  Binds: 25</a:t>
                       </a:r>
                     </a:p>
                   </a:txBody>
@@ -4428,7 +4428,7 @@
                           </a:solidFill>
                           <a:latin typeface="Segoe UI"/>
                         </a:rPr>
-                        <a:t>155</a:t>
+                        <a:t>156</a:t>
                       </a:r>
                     </a:p>
                   </a:txBody>
@@ -4465,7 +4465,7 @@
                         <a:rPr sz="800">
                           <a:latin typeface="Segoe UI"/>
                         </a:rPr>
-                        <a:t>282</a:t>
+                        <a:t>283</a:t>
                       </a:r>
                     </a:p>
                   </a:txBody>
@@ -4747,7 +4747,7 @@
                         <a:rPr sz="800">
                           <a:latin typeface="Segoe UI"/>
                         </a:rPr>
-                        <a:t>11.3%</a:t>
+                        <a:t>11.7%</a:t>
                       </a:r>
                     </a:p>
                   </a:txBody>
@@ -5020,7 +5020,7 @@
                         <a:rPr sz="800">
                           <a:latin typeface="Segoe UI"/>
                         </a:rPr>
-                        <a:t>32</a:t>
+                        <a:t>33</a:t>
                       </a:r>
                     </a:p>
                   </a:txBody>

--- a/generated/Tier 1 Broker Scorecards/CRC Insurance Services, Inc_Broker_Scorecard.pptx
+++ b/generated/Tier 1 Broker Scorecards/CRC Insurance Services, Inc_Broker_Scorecard.pptx
@@ -3394,7 +3394,7 @@
                         <a:rPr sz="900">
                           <a:latin typeface="Segoe UI"/>
                         </a:rPr>
-                        <a:t>Tier 1  |  4.14% / 15.00%</a:t>
+                        <a:t>Tier 1  |  4.12% / 15.00%</a:t>
                       </a:r>
                     </a:p>
                   </a:txBody>
@@ -3653,7 +3653,7 @@
                         <a:rPr sz="900">
                           <a:latin typeface="Segoe UI"/>
                         </a:rPr>
-                        <a:t>Fleet Subs: 89  |  Binds: 6</a:t>
+                        <a:t>Fleet Subs: 90  |  Binds: 6</a:t>
                       </a:r>
                     </a:p>
                   </a:txBody>
@@ -3766,7 +3766,7 @@
                         <a:rPr sz="900">
                           <a:latin typeface="Segoe UI"/>
                         </a:rPr>
-                        <a:t>Non-Fleet Subs: 660  |  Binds: 25</a:t>
+                        <a:t>Non-Fleet Subs: 662  |  Binds: 25</a:t>
                       </a:r>
                     </a:p>
                   </a:txBody>
@@ -4428,7 +4428,7 @@
                           </a:solidFill>
                           <a:latin typeface="Segoe UI"/>
                         </a:rPr>
-                        <a:t>156</a:t>
+                        <a:t>159</a:t>
                       </a:r>
                     </a:p>
                   </a:txBody>
@@ -4465,7 +4465,7 @@
                         <a:rPr sz="800">
                           <a:latin typeface="Segoe UI"/>
                         </a:rPr>
-                        <a:t>283</a:t>
+                        <a:t>282</a:t>
                       </a:r>
                     </a:p>
                   </a:txBody>
@@ -4707,7 +4707,7 @@
                           </a:solidFill>
                           <a:latin typeface="Segoe UI"/>
                         </a:rPr>
-                        <a:t>5.8%</a:t>
+                        <a:t>5.7%</a:t>
                       </a:r>
                     </a:p>
                   </a:txBody>
@@ -4747,7 +4747,7 @@
                         <a:rPr sz="800">
                           <a:latin typeface="Segoe UI"/>
                         </a:rPr>
-                        <a:t>11.7%</a:t>
+                        <a:t>11.3%</a:t>
                       </a:r>
                     </a:p>
                   </a:txBody>
@@ -5020,7 +5020,7 @@
                         <a:rPr sz="800">
                           <a:latin typeface="Segoe UI"/>
                         </a:rPr>
-                        <a:t>33</a:t>
+                        <a:t>32</a:t>
                       </a:r>
                     </a:p>
                   </a:txBody>

--- a/generated/Tier 1 Broker Scorecards/CRC Insurance Services, Inc_Broker_Scorecard.pptx
+++ b/generated/Tier 1 Broker Scorecards/CRC Insurance Services, Inc_Broker_Scorecard.pptx
@@ -3394,7 +3394,7 @@
                         <a:rPr sz="900">
                           <a:latin typeface="Segoe UI"/>
                         </a:rPr>
-                        <a:t>Tier 1  |  4.12% / 15.00%</a:t>
+                        <a:t>Tier 1  |  4.08% / 15.00%</a:t>
                       </a:r>
                     </a:p>
                   </a:txBody>
@@ -3766,7 +3766,7 @@
                         <a:rPr sz="900">
                           <a:latin typeface="Segoe UI"/>
                         </a:rPr>
-                        <a:t>Non-Fleet Subs: 662  |  Binds: 25</a:t>
+                        <a:t>Non-Fleet Subs: 669  |  Binds: 25</a:t>
                       </a:r>
                     </a:p>
                   </a:txBody>
@@ -4428,7 +4428,7 @@
                           </a:solidFill>
                           <a:latin typeface="Segoe UI"/>
                         </a:rPr>
-                        <a:t>159</a:t>
+                        <a:t>166</a:t>
                       </a:r>
                     </a:p>
                   </a:txBody>
@@ -4707,7 +4707,7 @@
                           </a:solidFill>
                           <a:latin typeface="Segoe UI"/>
                         </a:rPr>
-                        <a:t>5.7%</a:t>
+                        <a:t>5.4%</a:t>
                       </a:r>
                     </a:p>
                   </a:txBody>

--- a/generated/Tier 1 Broker Scorecards/CRC Insurance Services, Inc_Broker_Scorecard.pptx
+++ b/generated/Tier 1 Broker Scorecards/CRC Insurance Services, Inc_Broker_Scorecard.pptx
@@ -3357,7 +3357,7 @@
                         <a:rPr sz="800">
                           <a:latin typeface="Segoe UI"/>
                         </a:rPr>
-                        <a:t>$4,332,023.30 / $3,820,253.14 / $725,622.15</a:t>
+                        <a:t>$4,332,023.30 / $3,832,803.14 / $738,172.15</a:t>
                       </a:r>
                     </a:p>
                   </a:txBody>
@@ -3394,7 +3394,7 @@
                         <a:rPr sz="900">
                           <a:latin typeface="Segoe UI"/>
                         </a:rPr>
-                        <a:t>Tier 1  |  4.08% / 15.00%</a:t>
+                        <a:t>Tier 1  |  4.19% / 15.00%</a:t>
                       </a:r>
                     </a:p>
                   </a:txBody>
@@ -3431,7 +3431,7 @@
                         <a:rPr sz="900">
                           <a:latin typeface="Segoe UI"/>
                         </a:rPr>
-                        <a:t>$6,064,832.62  (12.0% achieved)</a:t>
+                        <a:t>$6,064,832.62  (12.2% achieved)</a:t>
                       </a:r>
                     </a:p>
                   </a:txBody>
@@ -3690,7 +3690,7 @@
                         <a:rPr sz="900">
                           <a:latin typeface="Segoe UI"/>
                         </a:rPr>
-                        <a:t>Fleet Bound Premium: $381,514.45</a:t>
+                        <a:t>Fleet Bound Premium: $384,619.34</a:t>
                       </a:r>
                     </a:p>
                   </a:txBody>
@@ -3727,7 +3727,7 @@
                         <a:rPr sz="900">
                           <a:latin typeface="Segoe UI"/>
                         </a:rPr>
-                        <a:t>Fleet Book %: 52.6%</a:t>
+                        <a:t>Fleet Book %: 52.1%</a:t>
                       </a:r>
                     </a:p>
                   </a:txBody>
@@ -3766,7 +3766,7 @@
                         <a:rPr sz="900">
                           <a:latin typeface="Segoe UI"/>
                         </a:rPr>
-                        <a:t>Non-Fleet Subs: 669  |  Binds: 25</a:t>
+                        <a:t>Non-Fleet Subs: 674  |  Binds: 26</a:t>
                       </a:r>
                     </a:p>
                   </a:txBody>
@@ -3803,7 +3803,7 @@
                         <a:rPr sz="900">
                           <a:latin typeface="Segoe UI"/>
                         </a:rPr>
-                        <a:t>Non-Fleet Bound Premium: $344,107.70</a:t>
+                        <a:t>Non-Fleet Bound Premium: $353,552.81</a:t>
                       </a:r>
                     </a:p>
                   </a:txBody>
@@ -3840,7 +3840,7 @@
                         <a:rPr sz="900">
                           <a:latin typeface="Segoe UI"/>
                         </a:rPr>
-                        <a:t>Non-Fleet Book %: 47.4%</a:t>
+                        <a:t>Non-Fleet Book %: 47.9%</a:t>
                       </a:r>
                     </a:p>
                   </a:txBody>
@@ -4428,7 +4428,7 @@
                           </a:solidFill>
                           <a:latin typeface="Segoe UI"/>
                         </a:rPr>
-                        <a:t>166</a:t>
+                        <a:t>171</a:t>
                       </a:r>
                     </a:p>
                   </a:txBody>
@@ -4624,7 +4624,7 @@
                           </a:solidFill>
                           <a:latin typeface="Segoe UI"/>
                         </a:rPr>
-                        <a:t>6.5%</a:t>
+                        <a:t>7.0%</a:t>
                       </a:r>
                     </a:p>
                   </a:txBody>
@@ -4707,7 +4707,7 @@
                           </a:solidFill>
                           <a:latin typeface="Segoe UI"/>
                         </a:rPr>
-                        <a:t>5.4%</a:t>
+                        <a:t>5.3%</a:t>
                       </a:r>
                     </a:p>
                   </a:txBody>
@@ -4906,7 +4906,7 @@
                           </a:solidFill>
                           <a:latin typeface="Segoe UI"/>
                         </a:rPr>
-                        <a:t>12</a:t>
+                        <a:t>13</a:t>
                       </a:r>
                     </a:p>
                   </a:txBody>
@@ -5262,7 +5262,7 @@
                           </a:solidFill>
                           <a:latin typeface="Segoe UI"/>
                         </a:rPr>
-                        <a:t>$167.7K</a:t>
+                        <a:t>$180.2K</a:t>
                       </a:r>
                     </a:p>
                   </a:txBody>

--- a/generated/Tier 1 Broker Scorecards/CRC Insurance Services, Inc_Broker_Scorecard.pptx
+++ b/generated/Tier 1 Broker Scorecards/CRC Insurance Services, Inc_Broker_Scorecard.pptx
@@ -3394,7 +3394,7 @@
                         <a:rPr sz="900">
                           <a:latin typeface="Segoe UI"/>
                         </a:rPr>
-                        <a:t>Tier 1  |  4.19% / 15.00%</a:t>
+                        <a:t>Tier 1  |  4.16% / 15.00%</a:t>
                       </a:r>
                     </a:p>
                   </a:txBody>
@@ -3653,7 +3653,7 @@
                         <a:rPr sz="900">
                           <a:latin typeface="Segoe UI"/>
                         </a:rPr>
-                        <a:t>Fleet Subs: 90  |  Binds: 6</a:t>
+                        <a:t>Fleet Subs: 91  |  Binds: 6</a:t>
                       </a:r>
                     </a:p>
                   </a:txBody>
@@ -3766,7 +3766,7 @@
                         <a:rPr sz="900">
                           <a:latin typeface="Segoe UI"/>
                         </a:rPr>
-                        <a:t>Non-Fleet Subs: 674  |  Binds: 26</a:t>
+                        <a:t>Non-Fleet Subs: 678  |  Binds: 26</a:t>
                       </a:r>
                     </a:p>
                   </a:txBody>
@@ -4428,7 +4428,7 @@
                           </a:solidFill>
                           <a:latin typeface="Segoe UI"/>
                         </a:rPr>
-                        <a:t>171</a:t>
+                        <a:t>176</a:t>
                       </a:r>
                     </a:p>
                   </a:txBody>
@@ -4707,7 +4707,7 @@
                           </a:solidFill>
                           <a:latin typeface="Segoe UI"/>
                         </a:rPr>
-                        <a:t>5.3%</a:t>
+                        <a:t>5.1%</a:t>
                       </a:r>
                     </a:p>
                   </a:txBody>

--- a/generated/Tier 1 Broker Scorecards/CRC Insurance Services, Inc_Broker_Scorecard.pptx
+++ b/generated/Tier 1 Broker Scorecards/CRC Insurance Services, Inc_Broker_Scorecard.pptx
@@ -3357,7 +3357,7 @@
                         <a:rPr sz="800">
                           <a:latin typeface="Segoe UI"/>
                         </a:rPr>
-                        <a:t>$4,332,023.30 / $3,832,803.14 / $738,172.15</a:t>
+                        <a:t>$4,332,023.30 / $3,936,821.79 / $842,190.80</a:t>
                       </a:r>
                     </a:p>
                   </a:txBody>
@@ -3394,7 +3394,7 @@
                         <a:rPr sz="900">
                           <a:latin typeface="Segoe UI"/>
                         </a:rPr>
-                        <a:t>Tier 1  |  4.16% / 15.00%</a:t>
+                        <a:t>Tier 1  |  4.12% / 15.00%</a:t>
                       </a:r>
                     </a:p>
                   </a:txBody>
@@ -3431,7 +3431,7 @@
                         <a:rPr sz="900">
                           <a:latin typeface="Segoe UI"/>
                         </a:rPr>
-                        <a:t>$6,064,832.62  (12.2% achieved)</a:t>
+                        <a:t>$6,064,832.62  (13.9% achieved)</a:t>
                       </a:r>
                     </a:p>
                   </a:txBody>
@@ -3690,7 +3690,7 @@
                         <a:rPr sz="900">
                           <a:latin typeface="Segoe UI"/>
                         </a:rPr>
-                        <a:t>Fleet Bound Premium: $384,619.34</a:t>
+                        <a:t>Fleet Bound Premium: $449,442.46</a:t>
                       </a:r>
                     </a:p>
                   </a:txBody>
@@ -3727,7 +3727,7 @@
                         <a:rPr sz="900">
                           <a:latin typeface="Segoe UI"/>
                         </a:rPr>
-                        <a:t>Fleet Book %: 52.1%</a:t>
+                        <a:t>Fleet Book %: 53.4%</a:t>
                       </a:r>
                     </a:p>
                   </a:txBody>
@@ -3766,7 +3766,7 @@
                         <a:rPr sz="900">
                           <a:latin typeface="Segoe UI"/>
                         </a:rPr>
-                        <a:t>Non-Fleet Subs: 678  |  Binds: 26</a:t>
+                        <a:t>Non-Fleet Subs: 685  |  Binds: 26</a:t>
                       </a:r>
                     </a:p>
                   </a:txBody>
@@ -3803,7 +3803,7 @@
                         <a:rPr sz="900">
                           <a:latin typeface="Segoe UI"/>
                         </a:rPr>
-                        <a:t>Non-Fleet Bound Premium: $353,552.81</a:t>
+                        <a:t>Non-Fleet Bound Premium: $392,748.34</a:t>
                       </a:r>
                     </a:p>
                   </a:txBody>
@@ -3840,7 +3840,7 @@
                         <a:rPr sz="900">
                           <a:latin typeface="Segoe UI"/>
                         </a:rPr>
-                        <a:t>Non-Fleet Book %: 47.9%</a:t>
+                        <a:t>Non-Fleet Book %: 46.6%</a:t>
                       </a:r>
                     </a:p>
                   </a:txBody>
@@ -4428,7 +4428,7 @@
                           </a:solidFill>
                           <a:latin typeface="Segoe UI"/>
                         </a:rPr>
-                        <a:t>176</a:t>
+                        <a:t>184</a:t>
                       </a:r>
                     </a:p>
                   </a:txBody>
@@ -4707,7 +4707,7 @@
                           </a:solidFill>
                           <a:latin typeface="Segoe UI"/>
                         </a:rPr>
-                        <a:t>5.1%</a:t>
+                        <a:t>4.9%</a:t>
                       </a:r>
                     </a:p>
                   </a:txBody>
@@ -5262,7 +5262,7 @@
                           </a:solidFill>
                           <a:latin typeface="Segoe UI"/>
                         </a:rPr>
-                        <a:t>$180.2K</a:t>
+                        <a:t>$284.2K</a:t>
                       </a:r>
                     </a:p>
                   </a:txBody>

--- a/generated/Tier 1 Broker Scorecards/CRC Insurance Services, Inc_Broker_Scorecard.pptx
+++ b/generated/Tier 1 Broker Scorecards/CRC Insurance Services, Inc_Broker_Scorecard.pptx
@@ -3357,7 +3357,7 @@
                         <a:rPr sz="800">
                           <a:latin typeface="Segoe UI"/>
                         </a:rPr>
-                        <a:t>$4,332,023.30 / $3,936,821.79 / $842,190.80</a:t>
+                        <a:t>$4,332,023.30 / $4,075,001.69 / $980,370.70</a:t>
                       </a:r>
                     </a:p>
                   </a:txBody>
@@ -3394,7 +3394,7 @@
                         <a:rPr sz="900">
                           <a:latin typeface="Segoe UI"/>
                         </a:rPr>
-                        <a:t>Tier 1  |  4.12% / 15.00%</a:t>
+                        <a:t>Tier 1  |  4.47% / 15.00%</a:t>
                       </a:r>
                     </a:p>
                   </a:txBody>
@@ -3431,7 +3431,7 @@
                         <a:rPr sz="900">
                           <a:latin typeface="Segoe UI"/>
                         </a:rPr>
-                        <a:t>$6,064,832.62  (13.9% achieved)</a:t>
+                        <a:t>$6,064,832.62  (16.2% achieved)</a:t>
                       </a:r>
                     </a:p>
                   </a:txBody>
@@ -3653,7 +3653,7 @@
                         <a:rPr sz="900">
                           <a:latin typeface="Segoe UI"/>
                         </a:rPr>
-                        <a:t>Fleet Subs: 91  |  Binds: 6</a:t>
+                        <a:t>Fleet Subs: 93  |  Binds: 7</a:t>
                       </a:r>
                     </a:p>
                   </a:txBody>
@@ -3690,7 +3690,7 @@
                         <a:rPr sz="900">
                           <a:latin typeface="Segoe UI"/>
                         </a:rPr>
-                        <a:t>Fleet Bound Premium: $449,442.46</a:t>
+                        <a:t>Fleet Bound Premium: $522,945.57</a:t>
                       </a:r>
                     </a:p>
                   </a:txBody>
@@ -3727,7 +3727,7 @@
                         <a:rPr sz="900">
                           <a:latin typeface="Segoe UI"/>
                         </a:rPr>
-                        <a:t>Fleet Book %: 53.4%</a:t>
+                        <a:t>Fleet Book %: 53.3%</a:t>
                       </a:r>
                     </a:p>
                   </a:txBody>
@@ -3766,7 +3766,7 @@
                         <a:rPr sz="900">
                           <a:latin typeface="Segoe UI"/>
                         </a:rPr>
-                        <a:t>Non-Fleet Subs: 685  |  Binds: 26</a:t>
+                        <a:t>Non-Fleet Subs: 690  |  Binds: 28</a:t>
                       </a:r>
                     </a:p>
                   </a:txBody>
@@ -3803,7 +3803,7 @@
                         <a:rPr sz="900">
                           <a:latin typeface="Segoe UI"/>
                         </a:rPr>
-                        <a:t>Non-Fleet Bound Premium: $392,748.34</a:t>
+                        <a:t>Non-Fleet Bound Premium: $457,425.13</a:t>
                       </a:r>
                     </a:p>
                   </a:txBody>
@@ -3840,7 +3840,7 @@
                         <a:rPr sz="900">
                           <a:latin typeface="Segoe UI"/>
                         </a:rPr>
-                        <a:t>Non-Fleet Book %: 46.6%</a:t>
+                        <a:t>Non-Fleet Book %: 46.7%</a:t>
                       </a:r>
                     </a:p>
                   </a:txBody>
@@ -4428,7 +4428,7 @@
                           </a:solidFill>
                           <a:latin typeface="Segoe UI"/>
                         </a:rPr>
-                        <a:t>184</a:t>
+                        <a:t>191</a:t>
                       </a:r>
                     </a:p>
                   </a:txBody>
@@ -4707,7 +4707,7 @@
                           </a:solidFill>
                           <a:latin typeface="Segoe UI"/>
                         </a:rPr>
-                        <a:t>4.9%</a:t>
+                        <a:t>6.3%</a:t>
                       </a:r>
                     </a:p>
                   </a:txBody>
@@ -4983,7 +4983,7 @@
                           </a:solidFill>
                           <a:latin typeface="Segoe UI"/>
                         </a:rPr>
-                        <a:t>9</a:t>
+                        <a:t>12</a:t>
                       </a:r>
                     </a:p>
                   </a:txBody>
@@ -5262,7 +5262,7 @@
                           </a:solidFill>
                           <a:latin typeface="Segoe UI"/>
                         </a:rPr>
-                        <a:t>$284.2K</a:t>
+                        <a:t>$422.4K</a:t>
                       </a:r>
                     </a:p>
                   </a:txBody>

--- a/generated/Tier 1 Broker Scorecards/CRC Insurance Services, Inc_Broker_Scorecard.pptx
+++ b/generated/Tier 1 Broker Scorecards/CRC Insurance Services, Inc_Broker_Scorecard.pptx
@@ -3394,7 +3394,7 @@
                         <a:rPr sz="900">
                           <a:latin typeface="Segoe UI"/>
                         </a:rPr>
-                        <a:t>Tier 1  |  4.47% / 15.00%</a:t>
+                        <a:t>Tier 1  |  4.46% / 15.00%</a:t>
                       </a:r>
                     </a:p>
                   </a:txBody>
@@ -3766,7 +3766,7 @@
                         <a:rPr sz="900">
                           <a:latin typeface="Segoe UI"/>
                         </a:rPr>
-                        <a:t>Non-Fleet Subs: 690  |  Binds: 28</a:t>
+                        <a:t>Non-Fleet Subs: 691  |  Binds: 28</a:t>
                       </a:r>
                     </a:p>
                   </a:txBody>
@@ -4428,7 +4428,7 @@
                           </a:solidFill>
                           <a:latin typeface="Segoe UI"/>
                         </a:rPr>
-                        <a:t>191</a:t>
+                        <a:t>192</a:t>
                       </a:r>
                     </a:p>
                   </a:txBody>
@@ -4707,7 +4707,7 @@
                           </a:solidFill>
                           <a:latin typeface="Segoe UI"/>
                         </a:rPr>
-                        <a:t>6.3%</a:t>
+                        <a:t>6.2%</a:t>
                       </a:r>
                     </a:p>
                   </a:txBody>

--- a/generated/Tier 1 Broker Scorecards/CRC Insurance Services, Inc_Broker_Scorecard.pptx
+++ b/generated/Tier 1 Broker Scorecards/CRC Insurance Services, Inc_Broker_Scorecard.pptx
@@ -3357,7 +3357,7 @@
                         <a:rPr sz="800">
                           <a:latin typeface="Segoe UI"/>
                         </a:rPr>
-                        <a:t>$4,332,023.30 / $4,075,001.69 / $980,370.70</a:t>
+                        <a:t>$4,332,023.30 / $3,620,838.65 / $980,370.70</a:t>
                       </a:r>
                     </a:p>
                   </a:txBody>
@@ -3394,7 +3394,7 @@
                         <a:rPr sz="900">
                           <a:latin typeface="Segoe UI"/>
                         </a:rPr>
-                        <a:t>Tier 1  |  4.46% / 15.00%</a:t>
+                        <a:t>Tier 1  |  4.45% / 15.00%</a:t>
                       </a:r>
                     </a:p>
                   </a:txBody>
@@ -3766,7 +3766,7 @@
                         <a:rPr sz="900">
                           <a:latin typeface="Segoe UI"/>
                         </a:rPr>
-                        <a:t>Non-Fleet Subs: 691  |  Binds: 28</a:t>
+                        <a:t>Non-Fleet Subs: 693  |  Binds: 28</a:t>
                       </a:r>
                     </a:p>
                   </a:txBody>
@@ -4428,7 +4428,7 @@
                           </a:solidFill>
                           <a:latin typeface="Segoe UI"/>
                         </a:rPr>
-                        <a:t>192</a:t>
+                        <a:t>194</a:t>
                       </a:r>
                     </a:p>
                   </a:txBody>
@@ -4500,9 +4500,12 @@
                       <a:pPr algn="ctr"/>
                       <a:r>
                         <a:rPr sz="800">
+                          <a:solidFill>
+                            <a:srgbClr val="DC2626"/>
+                          </a:solidFill>
                           <a:latin typeface="Segoe UI"/>
                         </a:rPr>
-                        <a:t/>
+                        <a:t>1</a:t>
                       </a:r>
                     </a:p>
                   </a:txBody>
